--- a/output_pptx/When_I_Survey_The_Wondrous_Cross.pptx
+++ b/output_pptx/When_I_Survey_The_Wondrous_Cross.pptx
@@ -3111,8 +3111,8 @@
         </p:nvSpPr>
         <p:spPr>
           <a:xfrm>
-            <a:off x="594360" y="1837944"/>
-            <a:ext cx="11002975" cy="685800"/>
+            <a:off x="640080" y="1650492"/>
+            <a:ext cx="10911535" cy="731520"/>
           </a:xfrm>
           <a:prstGeom prst="rect">
             <a:avLst/>
@@ -3127,7 +3127,7 @@
           <a:p>
             <a:pPr algn="ctr"/>
             <a:r>
-              <a:rPr sz="4400" b="1" i="0">
+              <a:rPr sz="4800" b="1" i="0">
                 <a:solidFill>
                   <a:srgbClr val="FFFFFF"/>
                 </a:solidFill>
@@ -3146,8 +3146,8 @@
         </p:nvSpPr>
         <p:spPr>
           <a:xfrm>
-            <a:off x="594360" y="2560320"/>
-            <a:ext cx="11002975" cy="384048"/>
+            <a:off x="640080" y="2418588"/>
+            <a:ext cx="10911535" cy="365760"/>
           </a:xfrm>
           <a:prstGeom prst="rect">
             <a:avLst/>
@@ -3164,7 +3164,7 @@
             <a:r>
               <a:rPr sz="2400" b="0" i="1">
                 <a:solidFill>
-                  <a:srgbClr val="B4B4B4"/>
+                  <a:srgbClr val="AAAAAA"/>
                 </a:solidFill>
                 <a:latin typeface="Arial"/>
               </a:rPr>
@@ -3181,8 +3181,8 @@
         </p:nvSpPr>
         <p:spPr>
           <a:xfrm>
-            <a:off x="594360" y="2980944"/>
-            <a:ext cx="11002975" cy="347472"/>
+            <a:off x="640080" y="2985516"/>
+            <a:ext cx="10911535" cy="731520"/>
           </a:xfrm>
           <a:prstGeom prst="rect">
             <a:avLst/>
@@ -3197,13 +3197,13 @@
           <a:p>
             <a:pPr algn="ctr"/>
             <a:r>
-              <a:rPr sz="2000" b="0" i="1">
-                <a:solidFill>
-                  <a:srgbClr val="8C8C8C"/>
+              <a:rPr sz="4800" b="1" i="0">
+                <a:solidFill>
+                  <a:srgbClr val="FFFFFF"/>
                 </a:solidFill>
                 <a:latin typeface="Arial"/>
               </a:rPr>
-              <a:t/>
+              <a:t>十字架を見る と き</a:t>
             </a:r>
           </a:p>
         </p:txBody>
@@ -3216,8 +3216,8 @@
         </p:nvSpPr>
         <p:spPr>
           <a:xfrm>
-            <a:off x="594360" y="3529584"/>
-            <a:ext cx="11002975" cy="685800"/>
+            <a:off x="640080" y="3753612"/>
+            <a:ext cx="10911535" cy="365760"/>
           </a:xfrm>
           <a:prstGeom prst="rect">
             <a:avLst/>
@@ -3232,13 +3232,13 @@
           <a:p>
             <a:pPr algn="ctr"/>
             <a:r>
-              <a:rPr sz="4400" b="1" i="0">
-                <a:solidFill>
-                  <a:srgbClr val="FFFFFF"/>
+              <a:rPr sz="2400" b="0" i="1">
+                <a:solidFill>
+                  <a:srgbClr val="AAAAAA"/>
                 </a:solidFill>
                 <a:latin typeface="Arial"/>
               </a:rPr>
-              <a:t>十字架を見る と き</a:t>
+              <a:t>jujika wo miru toki</a:t>
             </a:r>
           </a:p>
         </p:txBody>
@@ -3251,8 +3251,8 @@
         </p:nvSpPr>
         <p:spPr>
           <a:xfrm>
-            <a:off x="594360" y="4251960"/>
-            <a:ext cx="11002975" cy="384048"/>
+            <a:off x="640080" y="4530852"/>
+            <a:ext cx="10911535" cy="310896"/>
           </a:xfrm>
           <a:prstGeom prst="rect">
             <a:avLst/>
@@ -3267,13 +3267,13 @@
           <a:p>
             <a:pPr algn="ctr"/>
             <a:r>
-              <a:rPr sz="2400" b="0" i="1">
-                <a:solidFill>
-                  <a:srgbClr val="B4B4B4"/>
+              <a:rPr sz="2000" b="0" i="1">
+                <a:solidFill>
+                  <a:srgbClr val="828282"/>
                 </a:solidFill>
                 <a:latin typeface="Arial"/>
               </a:rPr>
-              <a:t>jujika wo miru toki</a:t>
+              <a:t>Quando contemplo a rude cruz</a:t>
             </a:r>
           </a:p>
         </p:txBody>
@@ -3286,8 +3286,8 @@
         </p:nvSpPr>
         <p:spPr>
           <a:xfrm>
-            <a:off x="594360" y="4672584"/>
-            <a:ext cx="11002975" cy="347472"/>
+            <a:off x="640080" y="4896612"/>
+            <a:ext cx="10911535" cy="310896"/>
           </a:xfrm>
           <a:prstGeom prst="rect">
             <a:avLst/>
@@ -3304,11 +3304,11 @@
             <a:r>
               <a:rPr sz="2000" b="0" i="1">
                 <a:solidFill>
-                  <a:srgbClr val="8C8C8C"/>
+                  <a:srgbClr val="828282"/>
                 </a:solidFill>
                 <a:latin typeface="Arial"/>
               </a:rPr>
-              <a:t/>
+              <a:t>Em que o Senhor Jesus morreu</a:t>
             </a:r>
           </a:p>
         </p:txBody>
@@ -3347,8 +3347,8 @@
         </p:nvSpPr>
         <p:spPr>
           <a:xfrm>
-            <a:off x="594360" y="1837944"/>
-            <a:ext cx="11002975" cy="685800"/>
+            <a:off x="640080" y="1650492"/>
+            <a:ext cx="10911535" cy="731520"/>
           </a:xfrm>
           <a:prstGeom prst="rect">
             <a:avLst/>
@@ -3363,7 +3363,7 @@
           <a:p>
             <a:pPr algn="ctr"/>
             <a:r>
-              <a:rPr sz="4400" b="1" i="0">
+              <a:rPr sz="4800" b="1" i="0">
                 <a:solidFill>
                   <a:srgbClr val="FFFFFF"/>
                 </a:solidFill>
@@ -3382,8 +3382,8 @@
         </p:nvSpPr>
         <p:spPr>
           <a:xfrm>
-            <a:off x="594360" y="2560320"/>
-            <a:ext cx="11002975" cy="384048"/>
+            <a:off x="640080" y="2418588"/>
+            <a:ext cx="10911535" cy="365760"/>
           </a:xfrm>
           <a:prstGeom prst="rect">
             <a:avLst/>
@@ -3400,7 +3400,7 @@
             <a:r>
               <a:rPr sz="2400" b="0" i="1">
                 <a:solidFill>
-                  <a:srgbClr val="B4B4B4"/>
+                  <a:srgbClr val="AAAAAA"/>
                 </a:solidFill>
                 <a:latin typeface="Arial"/>
               </a:rPr>
@@ -3417,8 +3417,8 @@
         </p:nvSpPr>
         <p:spPr>
           <a:xfrm>
-            <a:off x="594360" y="2980944"/>
-            <a:ext cx="11002975" cy="347472"/>
+            <a:off x="640080" y="2985516"/>
+            <a:ext cx="10911535" cy="731520"/>
           </a:xfrm>
           <a:prstGeom prst="rect">
             <a:avLst/>
@@ -3433,13 +3433,13 @@
           <a:p>
             <a:pPr algn="ctr"/>
             <a:r>
-              <a:rPr sz="2000" b="0" i="1">
-                <a:solidFill>
-                  <a:srgbClr val="8C8C8C"/>
+              <a:rPr sz="4800" b="1" i="0">
+                <a:solidFill>
+                  <a:srgbClr val="FFFFFF"/>
                 </a:solidFill>
                 <a:latin typeface="Arial"/>
               </a:rPr>
-              <a:t/>
+              <a:t>むなしく消え去る</a:t>
             </a:r>
           </a:p>
         </p:txBody>
@@ -3452,8 +3452,8 @@
         </p:nvSpPr>
         <p:spPr>
           <a:xfrm>
-            <a:off x="594360" y="3529584"/>
-            <a:ext cx="11002975" cy="685800"/>
+            <a:off x="640080" y="3753612"/>
+            <a:ext cx="10911535" cy="365760"/>
           </a:xfrm>
           <a:prstGeom prst="rect">
             <a:avLst/>
@@ -3468,13 +3468,13 @@
           <a:p>
             <a:pPr algn="ctr"/>
             <a:r>
-              <a:rPr sz="4400" b="1" i="0">
-                <a:solidFill>
-                  <a:srgbClr val="FFFFFF"/>
+              <a:rPr sz="2400" b="0" i="1">
+                <a:solidFill>
+                  <a:srgbClr val="AAAAAA"/>
                 </a:solidFill>
                 <a:latin typeface="Arial"/>
               </a:rPr>
-              <a:t>むなしく消え去る</a:t>
+              <a:t>munashiku kiesaru</a:t>
             </a:r>
           </a:p>
         </p:txBody>
@@ -3487,8 +3487,8 @@
         </p:nvSpPr>
         <p:spPr>
           <a:xfrm>
-            <a:off x="594360" y="4251960"/>
-            <a:ext cx="11002975" cy="384048"/>
+            <a:off x="640080" y="4530852"/>
+            <a:ext cx="10911535" cy="310896"/>
           </a:xfrm>
           <a:prstGeom prst="rect">
             <a:avLst/>
@@ -3503,13 +3503,13 @@
           <a:p>
             <a:pPr algn="ctr"/>
             <a:r>
-              <a:rPr sz="2400" b="0" i="1">
-                <a:solidFill>
-                  <a:srgbClr val="B4B4B4"/>
+              <a:rPr sz="2000" b="0" i="1">
+                <a:solidFill>
+                  <a:srgbClr val="828282"/>
                 </a:solidFill>
                 <a:latin typeface="Arial"/>
               </a:rPr>
-              <a:t>munashiku kiesaru</a:t>
+              <a:t>Perco todo o vão orgulho</a:t>
             </a:r>
           </a:p>
         </p:txBody>
@@ -3522,8 +3522,8 @@
         </p:nvSpPr>
         <p:spPr>
           <a:xfrm>
-            <a:off x="594360" y="4672584"/>
-            <a:ext cx="11002975" cy="347472"/>
+            <a:off x="640080" y="4896612"/>
+            <a:ext cx="10911535" cy="310896"/>
           </a:xfrm>
           <a:prstGeom prst="rect">
             <a:avLst/>
@@ -3540,11 +3540,11 @@
             <a:r>
               <a:rPr sz="2000" b="0" i="1">
                 <a:solidFill>
-                  <a:srgbClr val="8C8C8C"/>
+                  <a:srgbClr val="828282"/>
                 </a:solidFill>
                 <a:latin typeface="Arial"/>
               </a:rPr>
-              <a:t/>
+              <a:t>E quanto mais, tudo o que é meu</a:t>
             </a:r>
           </a:p>
         </p:txBody>
@@ -3583,8 +3583,8 @@
         </p:nvSpPr>
         <p:spPr>
           <a:xfrm>
-            <a:off x="594360" y="2258568"/>
-            <a:ext cx="11002975" cy="685800"/>
+            <a:off x="640080" y="2052828"/>
+            <a:ext cx="10911535" cy="731520"/>
           </a:xfrm>
           <a:prstGeom prst="rect">
             <a:avLst/>
@@ -3599,7 +3599,7 @@
           <a:p>
             <a:pPr algn="ctr"/>
             <a:r>
-              <a:rPr sz="4400" b="1" i="0">
+              <a:rPr sz="4800" b="1" i="0">
                 <a:solidFill>
                   <a:srgbClr val="FFFFFF"/>
                 </a:solidFill>
@@ -3618,8 +3618,8 @@
         </p:nvSpPr>
         <p:spPr>
           <a:xfrm>
-            <a:off x="594360" y="2980944"/>
-            <a:ext cx="11002975" cy="347472"/>
+            <a:off x="640080" y="2985516"/>
+            <a:ext cx="10911535" cy="731520"/>
           </a:xfrm>
           <a:prstGeom prst="rect">
             <a:avLst/>
@@ -3634,13 +3634,13 @@
           <a:p>
             <a:pPr algn="ctr"/>
             <a:r>
-              <a:rPr sz="2200" b="0" i="1">
-                <a:solidFill>
-                  <a:srgbClr val="8C8C8C"/>
+              <a:rPr sz="4800" b="1" i="0">
+                <a:solidFill>
+                  <a:srgbClr val="FFFFFF"/>
                 </a:solidFill>
                 <a:latin typeface="Arial"/>
               </a:rPr>
-              <a:t/>
+              <a:t>Em que o Senhor Jesus morreu</a:t>
             </a:r>
           </a:p>
         </p:txBody>
@@ -3653,8 +3653,8 @@
         </p:nvSpPr>
         <p:spPr>
           <a:xfrm>
-            <a:off x="594360" y="3529584"/>
-            <a:ext cx="11002975" cy="685800"/>
+            <a:off x="640080" y="4128516"/>
+            <a:ext cx="10911535" cy="310896"/>
           </a:xfrm>
           <a:prstGeom prst="rect">
             <a:avLst/>
@@ -3669,13 +3669,13 @@
           <a:p>
             <a:pPr algn="ctr"/>
             <a:r>
-              <a:rPr sz="4400" b="1" i="0">
-                <a:solidFill>
-                  <a:srgbClr val="FFFFFF"/>
+              <a:rPr sz="2000" b="0" i="0">
+                <a:solidFill>
+                  <a:srgbClr val="828282"/>
                 </a:solidFill>
                 <a:latin typeface="Arial"/>
               </a:rPr>
-              <a:t>Em que o Senhor Jesus morreu</a:t>
+              <a:t>主イエスの死なれた</a:t>
             </a:r>
           </a:p>
         </p:txBody>
@@ -3688,8 +3688,8 @@
         </p:nvSpPr>
         <p:spPr>
           <a:xfrm>
-            <a:off x="594360" y="4251960"/>
-            <a:ext cx="11002975" cy="347472"/>
+            <a:off x="640080" y="4494276"/>
+            <a:ext cx="10911535" cy="310896"/>
           </a:xfrm>
           <a:prstGeom prst="rect">
             <a:avLst/>
@@ -3704,13 +3704,13 @@
           <a:p>
             <a:pPr algn="ctr"/>
             <a:r>
-              <a:rPr sz="2200" b="0" i="1">
-                <a:solidFill>
-                  <a:srgbClr val="8C8C8C"/>
+              <a:rPr sz="2000" b="0" i="0">
+                <a:solidFill>
+                  <a:srgbClr val="828282"/>
                 </a:solidFill>
                 <a:latin typeface="Arial"/>
               </a:rPr>
-              <a:t/>
+              <a:t>十字架を見る と き</a:t>
             </a:r>
           </a:p>
         </p:txBody>
@@ -3749,8 +3749,8 @@
         </p:nvSpPr>
         <p:spPr>
           <a:xfrm>
-            <a:off x="594360" y="2258568"/>
-            <a:ext cx="11002975" cy="685800"/>
+            <a:off x="640080" y="2052828"/>
+            <a:ext cx="10911535" cy="731520"/>
           </a:xfrm>
           <a:prstGeom prst="rect">
             <a:avLst/>
@@ -3765,7 +3765,7 @@
           <a:p>
             <a:pPr algn="ctr"/>
             <a:r>
-              <a:rPr sz="4400" b="1" i="0">
+              <a:rPr sz="4800" b="1" i="0">
                 <a:solidFill>
                   <a:srgbClr val="FFFFFF"/>
                 </a:solidFill>
@@ -3784,8 +3784,8 @@
         </p:nvSpPr>
         <p:spPr>
           <a:xfrm>
-            <a:off x="594360" y="2980944"/>
-            <a:ext cx="11002975" cy="347472"/>
+            <a:off x="640080" y="2985516"/>
+            <a:ext cx="10911535" cy="731520"/>
           </a:xfrm>
           <a:prstGeom prst="rect">
             <a:avLst/>
@@ -3800,13 +3800,13 @@
           <a:p>
             <a:pPr algn="ctr"/>
             <a:r>
-              <a:rPr sz="2200" b="0" i="1">
-                <a:solidFill>
-                  <a:srgbClr val="8C8C8C"/>
+              <a:rPr sz="4800" b="1" i="0">
+                <a:solidFill>
+                  <a:srgbClr val="FFFFFF"/>
                 </a:solidFill>
                 <a:latin typeface="Arial"/>
               </a:rPr>
-              <a:t/>
+              <a:t>E quanto mais, tudo o que é meu</a:t>
             </a:r>
           </a:p>
         </p:txBody>
@@ -3819,8 +3819,8 @@
         </p:nvSpPr>
         <p:spPr>
           <a:xfrm>
-            <a:off x="594360" y="3529584"/>
-            <a:ext cx="11002975" cy="685800"/>
+            <a:off x="640080" y="4128516"/>
+            <a:ext cx="10911535" cy="310896"/>
           </a:xfrm>
           <a:prstGeom prst="rect">
             <a:avLst/>
@@ -3835,13 +3835,13 @@
           <a:p>
             <a:pPr algn="ctr"/>
             <a:r>
-              <a:rPr sz="4400" b="1" i="0">
-                <a:solidFill>
-                  <a:srgbClr val="FFFFFF"/>
+              <a:rPr sz="2000" b="0" i="0">
+                <a:solidFill>
+                  <a:srgbClr val="828282"/>
                 </a:solidFill>
                 <a:latin typeface="Arial"/>
               </a:rPr>
-              <a:t>E quanto mais, tudo o que é meu</a:t>
+              <a:t>この世の誉れは</a:t>
             </a:r>
           </a:p>
         </p:txBody>
@@ -3854,8 +3854,8 @@
         </p:nvSpPr>
         <p:spPr>
           <a:xfrm>
-            <a:off x="594360" y="4251960"/>
-            <a:ext cx="11002975" cy="347472"/>
+            <a:off x="640080" y="4494276"/>
+            <a:ext cx="10911535" cy="310896"/>
           </a:xfrm>
           <a:prstGeom prst="rect">
             <a:avLst/>
@@ -3870,13 +3870,13 @@
           <a:p>
             <a:pPr algn="ctr"/>
             <a:r>
-              <a:rPr sz="2200" b="0" i="1">
-                <a:solidFill>
-                  <a:srgbClr val="8C8C8C"/>
+              <a:rPr sz="2000" b="0" i="0">
+                <a:solidFill>
+                  <a:srgbClr val="828282"/>
                 </a:solidFill>
                 <a:latin typeface="Arial"/>
               </a:rPr>
-              <a:t/>
+              <a:t>むなしく消え去る</a:t>
             </a:r>
           </a:p>
         </p:txBody>
@@ -3915,8 +3915,8 @@
         </p:nvSpPr>
         <p:spPr>
           <a:xfrm>
-            <a:off x="594360" y="1837944"/>
-            <a:ext cx="11002975" cy="685800"/>
+            <a:off x="640080" y="1650492"/>
+            <a:ext cx="10911535" cy="731520"/>
           </a:xfrm>
           <a:prstGeom prst="rect">
             <a:avLst/>
@@ -3931,7 +3931,7 @@
           <a:p>
             <a:pPr algn="ctr"/>
             <a:r>
-              <a:rPr sz="4400" b="1" i="0">
+              <a:rPr sz="4800" b="1" i="0">
                 <a:solidFill>
                   <a:srgbClr val="FFFFFF"/>
                 </a:solidFill>
@@ -3950,8 +3950,8 @@
         </p:nvSpPr>
         <p:spPr>
           <a:xfrm>
-            <a:off x="594360" y="2560320"/>
-            <a:ext cx="11002975" cy="384048"/>
+            <a:off x="640080" y="2418588"/>
+            <a:ext cx="10911535" cy="365760"/>
           </a:xfrm>
           <a:prstGeom prst="rect">
             <a:avLst/>
@@ -3968,7 +3968,7 @@
             <a:r>
               <a:rPr sz="2400" b="0" i="1">
                 <a:solidFill>
-                  <a:srgbClr val="B4B4B4"/>
+                  <a:srgbClr val="AAAAAA"/>
                 </a:solidFill>
                 <a:latin typeface="Arial"/>
               </a:rPr>
@@ -3985,8 +3985,8 @@
         </p:nvSpPr>
         <p:spPr>
           <a:xfrm>
-            <a:off x="594360" y="2980944"/>
-            <a:ext cx="11002975" cy="347472"/>
+            <a:off x="640080" y="2985516"/>
+            <a:ext cx="10911535" cy="731520"/>
           </a:xfrm>
           <a:prstGeom prst="rect">
             <a:avLst/>
@@ -4001,13 +4001,13 @@
           <a:p>
             <a:pPr algn="ctr"/>
             <a:r>
-              <a:rPr sz="2000" b="0" i="1">
-                <a:solidFill>
-                  <a:srgbClr val="8C8C8C"/>
+              <a:rPr sz="4800" b="1" i="0">
+                <a:solidFill>
+                  <a:srgbClr val="FFFFFF"/>
                 </a:solidFill>
                 <a:latin typeface="Arial"/>
               </a:rPr>
-              <a:t/>
+              <a:t>かがやく　かんむり</a:t>
             </a:r>
           </a:p>
         </p:txBody>
@@ -4020,8 +4020,8 @@
         </p:nvSpPr>
         <p:spPr>
           <a:xfrm>
-            <a:off x="594360" y="3529584"/>
-            <a:ext cx="11002975" cy="685800"/>
+            <a:off x="640080" y="3753612"/>
+            <a:ext cx="10911535" cy="365760"/>
           </a:xfrm>
           <a:prstGeom prst="rect">
             <a:avLst/>
@@ -4036,13 +4036,13 @@
           <a:p>
             <a:pPr algn="ctr"/>
             <a:r>
-              <a:rPr sz="4400" b="1" i="0">
-                <a:solidFill>
-                  <a:srgbClr val="FFFFFF"/>
+              <a:rPr sz="2400" b="0" i="1">
+                <a:solidFill>
+                  <a:srgbClr val="AAAAAA"/>
                 </a:solidFill>
                 <a:latin typeface="Arial"/>
               </a:rPr>
-              <a:t>かがやく　かんむり</a:t>
+              <a:t>kagayaku kanmuri</a:t>
             </a:r>
           </a:p>
         </p:txBody>
@@ -4055,8 +4055,8 @@
         </p:nvSpPr>
         <p:spPr>
           <a:xfrm>
-            <a:off x="594360" y="4251960"/>
-            <a:ext cx="11002975" cy="384048"/>
+            <a:off x="640080" y="4530852"/>
+            <a:ext cx="10911535" cy="310896"/>
           </a:xfrm>
           <a:prstGeom prst="rect">
             <a:avLst/>
@@ -4071,13 +4071,13 @@
           <a:p>
             <a:pPr algn="ctr"/>
             <a:r>
-              <a:rPr sz="2400" b="0" i="1">
-                <a:solidFill>
-                  <a:srgbClr val="B4B4B4"/>
+              <a:rPr sz="2000" b="0" i="1">
+                <a:solidFill>
+                  <a:srgbClr val="828282"/>
                 </a:solidFill>
                 <a:latin typeface="Arial"/>
               </a:rPr>
-              <a:t>kagayaku kanmuri</a:t>
+              <a:t>Desprezai os falsos bens</a:t>
             </a:r>
           </a:p>
         </p:txBody>
@@ -4090,8 +4090,8 @@
         </p:nvSpPr>
         <p:spPr>
           <a:xfrm>
-            <a:off x="594360" y="4672584"/>
-            <a:ext cx="11002975" cy="347472"/>
+            <a:off x="640080" y="4896612"/>
+            <a:ext cx="10911535" cy="310896"/>
           </a:xfrm>
           <a:prstGeom prst="rect">
             <a:avLst/>
@@ -4108,11 +4108,11 @@
             <a:r>
               <a:rPr sz="2000" b="0" i="1">
                 <a:solidFill>
-                  <a:srgbClr val="8C8C8C"/>
+                  <a:srgbClr val="828282"/>
                 </a:solidFill>
                 <a:latin typeface="Arial"/>
               </a:rPr>
-              <a:t/>
+              <a:t>O sangue de Cristo, único</a:t>
             </a:r>
           </a:p>
         </p:txBody>
@@ -4151,8 +4151,8 @@
         </p:nvSpPr>
         <p:spPr>
           <a:xfrm>
-            <a:off x="594360" y="1837944"/>
-            <a:ext cx="11002975" cy="685800"/>
+            <a:off x="640080" y="1650492"/>
+            <a:ext cx="10911535" cy="731520"/>
           </a:xfrm>
           <a:prstGeom prst="rect">
             <a:avLst/>
@@ -4167,7 +4167,7 @@
           <a:p>
             <a:pPr algn="ctr"/>
             <a:r>
-              <a:rPr sz="4400" b="1" i="0">
+              <a:rPr sz="4800" b="1" i="0">
                 <a:solidFill>
                   <a:srgbClr val="FFFFFF"/>
                 </a:solidFill>
@@ -4186,8 +4186,8 @@
         </p:nvSpPr>
         <p:spPr>
           <a:xfrm>
-            <a:off x="594360" y="2560320"/>
-            <a:ext cx="11002975" cy="384048"/>
+            <a:off x="640080" y="2418588"/>
+            <a:ext cx="10911535" cy="365760"/>
           </a:xfrm>
           <a:prstGeom prst="rect">
             <a:avLst/>
@@ -4204,7 +4204,7 @@
             <a:r>
               <a:rPr sz="2400" b="0" i="1">
                 <a:solidFill>
-                  <a:srgbClr val="B4B4B4"/>
+                  <a:srgbClr val="AAAAAA"/>
                 </a:solidFill>
                 <a:latin typeface="Arial"/>
               </a:rPr>
@@ -4221,8 +4221,8 @@
         </p:nvSpPr>
         <p:spPr>
           <a:xfrm>
-            <a:off x="594360" y="2980944"/>
-            <a:ext cx="11002975" cy="347472"/>
+            <a:off x="640080" y="2985516"/>
+            <a:ext cx="10911535" cy="731520"/>
           </a:xfrm>
           <a:prstGeom prst="rect">
             <a:avLst/>
@@ -4237,13 +4237,13 @@
           <a:p>
             <a:pPr algn="ctr"/>
             <a:r>
-              <a:rPr sz="2000" b="0" i="1">
-                <a:solidFill>
-                  <a:srgbClr val="8C8C8C"/>
+              <a:rPr sz="4800" b="1" i="0">
+                <a:solidFill>
+                  <a:srgbClr val="FFFFFF"/>
                 </a:solidFill>
                 <a:latin typeface="Arial"/>
               </a:rPr>
-              <a:t/>
+              <a:t>十字架に交わる</a:t>
             </a:r>
           </a:p>
         </p:txBody>
@@ -4256,8 +4256,8 @@
         </p:nvSpPr>
         <p:spPr>
           <a:xfrm>
-            <a:off x="594360" y="3529584"/>
-            <a:ext cx="11002975" cy="685800"/>
+            <a:off x="640080" y="3753612"/>
+            <a:ext cx="10911535" cy="365760"/>
           </a:xfrm>
           <a:prstGeom prst="rect">
             <a:avLst/>
@@ -4272,13 +4272,13 @@
           <a:p>
             <a:pPr algn="ctr"/>
             <a:r>
-              <a:rPr sz="4400" b="1" i="0">
-                <a:solidFill>
-                  <a:srgbClr val="FFFFFF"/>
+              <a:rPr sz="2400" b="0" i="1">
+                <a:solidFill>
+                  <a:srgbClr val="AAAAAA"/>
                 </a:solidFill>
                 <a:latin typeface="Arial"/>
               </a:rPr>
-              <a:t>十字架に交わる</a:t>
+              <a:t>jujika ni majiwaru</a:t>
             </a:r>
           </a:p>
         </p:txBody>
@@ -4291,8 +4291,8 @@
         </p:nvSpPr>
         <p:spPr>
           <a:xfrm>
-            <a:off x="594360" y="4251960"/>
-            <a:ext cx="11002975" cy="384048"/>
+            <a:off x="640080" y="4530852"/>
+            <a:ext cx="10911535" cy="310896"/>
           </a:xfrm>
           <a:prstGeom prst="rect">
             <a:avLst/>
@@ -4307,13 +4307,13 @@
           <a:p>
             <a:pPr algn="ctr"/>
             <a:r>
-              <a:rPr sz="2400" b="0" i="1">
-                <a:solidFill>
-                  <a:srgbClr val="B4B4B4"/>
+              <a:rPr sz="2000" b="0" i="1">
+                <a:solidFill>
+                  <a:srgbClr val="828282"/>
                 </a:solidFill>
                 <a:latin typeface="Arial"/>
               </a:rPr>
-              <a:t>jujika ni majiwaru</a:t>
+              <a:t>Demanda e recebe todo meu amor</a:t>
             </a:r>
           </a:p>
         </p:txBody>
@@ -4326,8 +4326,8 @@
         </p:nvSpPr>
         <p:spPr>
           <a:xfrm>
-            <a:off x="594360" y="4672584"/>
-            <a:ext cx="11002975" cy="347472"/>
+            <a:off x="640080" y="4896612"/>
+            <a:ext cx="10911535" cy="310896"/>
           </a:xfrm>
           <a:prstGeom prst="rect">
             <a:avLst/>
@@ -4344,11 +4344,11 @@
             <a:r>
               <a:rPr sz="2000" b="0" i="1">
                 <a:solidFill>
-                  <a:srgbClr val="8C8C8C"/>
+                  <a:srgbClr val="828282"/>
                 </a:solidFill>
                 <a:latin typeface="Arial"/>
               </a:rPr>
-              <a:t/>
+              <a:t>Desprezai os falsos bens</a:t>
             </a:r>
           </a:p>
         </p:txBody>
@@ -4387,8 +4387,8 @@
         </p:nvSpPr>
         <p:spPr>
           <a:xfrm>
-            <a:off x="594360" y="2258568"/>
-            <a:ext cx="11002975" cy="685800"/>
+            <a:off x="640080" y="2052828"/>
+            <a:ext cx="10911535" cy="731520"/>
           </a:xfrm>
           <a:prstGeom prst="rect">
             <a:avLst/>
@@ -4403,7 +4403,7 @@
           <a:p>
             <a:pPr algn="ctr"/>
             <a:r>
-              <a:rPr sz="4400" b="1" i="0">
+              <a:rPr sz="4800" b="1" i="0">
                 <a:solidFill>
                   <a:srgbClr val="FFFFFF"/>
                 </a:solidFill>
@@ -4422,8 +4422,8 @@
         </p:nvSpPr>
         <p:spPr>
           <a:xfrm>
-            <a:off x="594360" y="2980944"/>
-            <a:ext cx="11002975" cy="347472"/>
+            <a:off x="640080" y="2985516"/>
+            <a:ext cx="10911535" cy="731520"/>
           </a:xfrm>
           <a:prstGeom prst="rect">
             <a:avLst/>
@@ -4438,13 +4438,13 @@
           <a:p>
             <a:pPr algn="ctr"/>
             <a:r>
-              <a:rPr sz="2200" b="0" i="1">
-                <a:solidFill>
-                  <a:srgbClr val="8C8C8C"/>
+              <a:rPr sz="4800" b="1" i="0">
+                <a:solidFill>
+                  <a:srgbClr val="FFFFFF"/>
                 </a:solidFill>
                 <a:latin typeface="Arial"/>
               </a:rPr>
-              <a:t/>
+              <a:t>O sangue de Cristo, único</a:t>
             </a:r>
           </a:p>
         </p:txBody>
@@ -4457,8 +4457,8 @@
         </p:nvSpPr>
         <p:spPr>
           <a:xfrm>
-            <a:off x="594360" y="3529584"/>
-            <a:ext cx="11002975" cy="685800"/>
+            <a:off x="640080" y="4128516"/>
+            <a:ext cx="10911535" cy="310896"/>
           </a:xfrm>
           <a:prstGeom prst="rect">
             <a:avLst/>
@@ -4473,13 +4473,13 @@
           <a:p>
             <a:pPr algn="ctr"/>
             <a:r>
-              <a:rPr sz="4400" b="1" i="0">
-                <a:solidFill>
-                  <a:srgbClr val="FFFFFF"/>
+              <a:rPr sz="2000" b="0" i="0">
+                <a:solidFill>
+                  <a:srgbClr val="828282"/>
                 </a:solidFill>
                 <a:latin typeface="Arial"/>
               </a:rPr>
-              <a:t>O sangue de Cristo, único</a:t>
+              <a:t>こうべのいばらは</a:t>
             </a:r>
           </a:p>
         </p:txBody>
@@ -4492,8 +4492,8 @@
         </p:nvSpPr>
         <p:spPr>
           <a:xfrm>
-            <a:off x="594360" y="4251960"/>
-            <a:ext cx="11002975" cy="347472"/>
+            <a:off x="640080" y="4494276"/>
+            <a:ext cx="10911535" cy="310896"/>
           </a:xfrm>
           <a:prstGeom prst="rect">
             <a:avLst/>
@@ -4508,13 +4508,13 @@
           <a:p>
             <a:pPr algn="ctr"/>
             <a:r>
-              <a:rPr sz="2200" b="0" i="1">
-                <a:solidFill>
-                  <a:srgbClr val="8C8C8C"/>
+              <a:rPr sz="2000" b="0" i="0">
+                <a:solidFill>
+                  <a:srgbClr val="828282"/>
                 </a:solidFill>
                 <a:latin typeface="Arial"/>
               </a:rPr>
-              <a:t/>
+              <a:t>かがやく　かんむり</a:t>
             </a:r>
           </a:p>
         </p:txBody>
@@ -4553,8 +4553,8 @@
         </p:nvSpPr>
         <p:spPr>
           <a:xfrm>
-            <a:off x="594360" y="2258568"/>
-            <a:ext cx="11002975" cy="685800"/>
+            <a:off x="640080" y="2052828"/>
+            <a:ext cx="10911535" cy="731520"/>
           </a:xfrm>
           <a:prstGeom prst="rect">
             <a:avLst/>
@@ -4569,7 +4569,7 @@
           <a:p>
             <a:pPr algn="ctr"/>
             <a:r>
-              <a:rPr sz="4400" b="1" i="0">
+              <a:rPr sz="4800" b="1" i="0">
                 <a:solidFill>
                   <a:srgbClr val="FFFFFF"/>
                 </a:solidFill>
@@ -4588,8 +4588,8 @@
         </p:nvSpPr>
         <p:spPr>
           <a:xfrm>
-            <a:off x="594360" y="2980944"/>
-            <a:ext cx="11002975" cy="347472"/>
+            <a:off x="640080" y="2985516"/>
+            <a:ext cx="10911535" cy="731520"/>
           </a:xfrm>
           <a:prstGeom prst="rect">
             <a:avLst/>
@@ -4604,13 +4604,13 @@
           <a:p>
             <a:pPr algn="ctr"/>
             <a:r>
-              <a:rPr sz="2200" b="0" i="1">
-                <a:solidFill>
-                  <a:srgbClr val="8C8C8C"/>
+              <a:rPr sz="4800" b="1" i="0">
+                <a:solidFill>
+                  <a:srgbClr val="FFFFFF"/>
                 </a:solidFill>
                 <a:latin typeface="Arial"/>
               </a:rPr>
-              <a:t/>
+              <a:t>Desprezai os falsos bens</a:t>
             </a:r>
           </a:p>
         </p:txBody>
@@ -4623,8 +4623,8 @@
         </p:nvSpPr>
         <p:spPr>
           <a:xfrm>
-            <a:off x="594360" y="3529584"/>
-            <a:ext cx="11002975" cy="685800"/>
+            <a:off x="640080" y="4128516"/>
+            <a:ext cx="10911535" cy="310896"/>
           </a:xfrm>
           <a:prstGeom prst="rect">
             <a:avLst/>
@@ -4639,13 +4639,13 @@
           <a:p>
             <a:pPr algn="ctr"/>
             <a:r>
-              <a:rPr sz="4400" b="1" i="0">
-                <a:solidFill>
-                  <a:srgbClr val="FFFFFF"/>
+              <a:rPr sz="2000" b="0" i="0">
+                <a:solidFill>
+                  <a:srgbClr val="828282"/>
                 </a:solidFill>
                 <a:latin typeface="Arial"/>
               </a:rPr>
-              <a:t>Desprezai os falsos bens</a:t>
+              <a:t>主の愛　悲しみ</a:t>
             </a:r>
           </a:p>
         </p:txBody>
@@ -4658,8 +4658,8 @@
         </p:nvSpPr>
         <p:spPr>
           <a:xfrm>
-            <a:off x="594360" y="4251960"/>
-            <a:ext cx="11002975" cy="347472"/>
+            <a:off x="640080" y="4494276"/>
+            <a:ext cx="10911535" cy="310896"/>
           </a:xfrm>
           <a:prstGeom prst="rect">
             <a:avLst/>
@@ -4674,13 +4674,13 @@
           <a:p>
             <a:pPr algn="ctr"/>
             <a:r>
-              <a:rPr sz="2200" b="0" i="1">
-                <a:solidFill>
-                  <a:srgbClr val="8C8C8C"/>
+              <a:rPr sz="2000" b="0" i="0">
+                <a:solidFill>
+                  <a:srgbClr val="828282"/>
                 </a:solidFill>
                 <a:latin typeface="Arial"/>
               </a:rPr>
-              <a:t/>
+              <a:t>十字架に交わる</a:t>
             </a:r>
           </a:p>
         </p:txBody>
